--- a/e2e/fixtures/templates/complex-group-template.pptx
+++ b/e2e/fixtures/templates/complex-group-template.pptx
@@ -90,7 +90,7 @@
           <p:cNvPr id="2" name="TextBox 2">
             <a:extLst>
               <a:ext uri="{FF2B5EF4-FFF2-40B4-BE49-F238E27FC236}">
-                <a16:creationId xmlns:a16="http://schemas.microsoft.com/office/drawing/2014/main" id="{C187181B-751A-4E3E-809C-77A7A97CBC0C}"/>
+                <a16:creationId xmlns:a16="http://schemas.microsoft.com/office/drawing/2014/main" id="{8D0DE325-293C-482D-B0CC-088965896E65}"/>
               </a:ext>
             </a:extLst>
           </p:cNvPr>
@@ -119,7 +119,7 @@
           <p:cNvPr id="3" name="TextBox 3">
             <a:extLst>
               <a:ext uri="{FF2B5EF4-FFF2-40B4-BE49-F238E27FC236}">
-                <a16:creationId xmlns:a16="http://schemas.microsoft.com/office/drawing/2014/main" id="{2263BC3F-0D85-45E1-A939-AE85006D4E0A}"/>
+                <a16:creationId xmlns:a16="http://schemas.microsoft.com/office/drawing/2014/main" id="{3368AB65-3783-4DFE-A7BD-07BED5B3E033}"/>
               </a:ext>
             </a:extLst>
           </p:cNvPr>

--- a/e2e/fixtures/templates/complex-group-template.pptx
+++ b/e2e/fixtures/templates/complex-group-template.pptx
@@ -90,7 +90,7 @@
           <p:cNvPr id="2" name="TextBox 2">
             <a:extLst>
               <a:ext uri="{FF2B5EF4-FFF2-40B4-BE49-F238E27FC236}">
-                <a16:creationId xmlns:a16="http://schemas.microsoft.com/office/drawing/2014/main" id="{8D0DE325-293C-482D-B0CC-088965896E65}"/>
+                <a16:creationId xmlns:a16="http://schemas.microsoft.com/office/drawing/2014/main" id="{02C8CA31-963B-4F7D-991E-61B2CDFE5686}"/>
               </a:ext>
             </a:extLst>
           </p:cNvPr>
@@ -119,7 +119,7 @@
           <p:cNvPr id="3" name="TextBox 3">
             <a:extLst>
               <a:ext uri="{FF2B5EF4-FFF2-40B4-BE49-F238E27FC236}">
-                <a16:creationId xmlns:a16="http://schemas.microsoft.com/office/drawing/2014/main" id="{3368AB65-3783-4DFE-A7BD-07BED5B3E033}"/>
+                <a16:creationId xmlns:a16="http://schemas.microsoft.com/office/drawing/2014/main" id="{7B23DC5D-3864-4738-B887-896CC3161DD2}"/>
               </a:ext>
             </a:extLst>
           </p:cNvPr>
